--- a/agent-engineering-book/Gemini/1-Foundations/Classes/class-01/Presentations/Class_1_Assignment_Agent_Engineering_Workspace.pptx
+++ b/agent-engineering-book/Gemini/1-Foundations/Classes/class-01/Presentations/Class_1_Assignment_Agent_Engineering_Workspace.pptx
@@ -4,6 +4,9 @@
   <p:sldMasterIdLst>
     <p:sldMasterId id="2147483648" r:id="rId1"/>
   </p:sldMasterIdLst>
+  <p:notesMasterIdLst>
+    <p:notesMasterId r:id="rId14"/>
+  </p:notesMasterIdLst>
   <p:sldIdLst>
     <p:sldId id="256" r:id="rId2"/>
     <p:sldId id="257" r:id="rId3"/>
@@ -18,11 +21,8 @@
     <p:sldId id="266" r:id="rId12"/>
     <p:sldId id="267" r:id="rId13"/>
   </p:sldIdLst>
-  <p:notesMasterIdLst>
-    <p:notesMasterId r:id="rId14"/>
-  </p:notesMasterIdLst>
-  <p:sldSz cx="12191695" cy="6858000"/>
-  <p:notesSz cx="6858000" cy="12191695"/>
+  <p:sldSz cx="12192000" cy="6858000"/>
+  <p:notesSz cx="6858000" cy="12192000"/>
   <p:defaultTextStyle>
     <a:lvl1pPr marL="0" algn="l" defTabSz="914400" rtl="0" eaLnBrk="1" latinLnBrk="0" hangingPunct="1">
       <a:defRPr sz="1800" kern="1200">
@@ -115,6 +115,11 @@
       </a:defRPr>
     </a:lvl9pPr>
   </p:defaultTextStyle>
+  <p:extLst>
+    <p:ext uri="{EFAFB233-063F-42B5-8137-9DF3F51BA10A}">
+      <p15:sldGuideLst xmlns:p15="http://schemas.microsoft.com/office/powerpoint/2012/main"/>
+    </p:ext>
+  </p:extLst>
 </p:presentation>
 </file>
 
@@ -140,234 +145,10 @@
           <a:chExt cx="0" cy="0"/>
         </a:xfrm>
       </p:grpSpPr>
-      <p:sp>
-        <p:nvSpPr>
-          <p:cNvPr id="2" name="Header Placeholder 1"/>
-          <p:cNvSpPr>
-            <a:spLocks noGrp="1"/>
-          </p:cNvSpPr>
-          <p:nvPr>
-            <p:ph type="hdr" sz="quarter"/>
-          </p:nvPr>
-        </p:nvSpPr>
-        <p:spPr>
-          <a:xfrm>
-            <a:off x="0" y="0"/>
-            <a:ext cx="2971800" cy="458788"/>
-          </a:xfrm>
-          <a:prstGeom prst="rect">
-            <a:avLst/>
-          </a:prstGeom>
-        </p:spPr>
-        <p:txBody>
-          <a:bodyPr vert="horz" lIns="91440" tIns="45720" rIns="91440" bIns="45720" rtlCol="0"/>
-          <a:lstStyle>
-            <a:lvl1pPr algn="l">
-              <a:defRPr sz="1200"/>
-            </a:lvl1pPr>
-          </a:lstStyle>
-          <a:p>
-            <a:endParaRPr lang="en-US"/>
-          </a:p>
-        </p:txBody>
-      </p:sp>
-      <p:sp>
-        <p:nvSpPr>
-          <p:cNvPr id="3" name="Date Placeholder 2"/>
-          <p:cNvSpPr>
-            <a:spLocks noGrp="1"/>
-          </p:cNvSpPr>
-          <p:nvPr>
-            <p:ph type="dt" idx="1"/>
-          </p:nvPr>
-        </p:nvSpPr>
-        <p:spPr>
-          <a:xfrm>
-            <a:off x="3884613" y="0"/>
-            <a:ext cx="2971800" cy="458788"/>
-          </a:xfrm>
-          <a:prstGeom prst="rect">
-            <a:avLst/>
-          </a:prstGeom>
-        </p:spPr>
-        <p:txBody>
-          <a:bodyPr vert="horz" lIns="91440" tIns="45720" rIns="91440" bIns="45720" rtlCol="0"/>
-          <a:lstStyle>
-            <a:lvl1pPr algn="r">
-              <a:defRPr sz="1200"/>
-            </a:lvl1pPr>
-          </a:lstStyle>
-          <a:p>
-            <a:fld id="{5282F153-3F37-0F45-9E97-73ACFA13230C}" type="datetimeFigureOut">
-              <a:rPr lang="en-US"/>
-              <a:t>7/23/19</a:t>
-            </a:fld>
-            <a:endParaRPr lang="en-US"/>
-          </a:p>
-        </p:txBody>
-      </p:sp>
-      <p:sp>
-        <p:nvSpPr>
-          <p:cNvPr id="4" name="Slide Image Placeholder 3"/>
-          <p:cNvSpPr>
-            <a:spLocks noGrp="1" noRot="1" noChangeAspect="1"/>
-          </p:cNvSpPr>
-          <p:nvPr>
-            <p:ph type="sldImg" idx="2"/>
-          </p:nvPr>
-        </p:nvSpPr>
-        <p:spPr>
-          <a:xfrm>
-            <a:off x="685800" y="1143000"/>
-            <a:ext cx="5486400" cy="3086100"/>
-          </a:xfrm>
-          <a:prstGeom prst="rect">
-            <a:avLst/>
-          </a:prstGeom>
-          <a:noFill/>
-          <a:ln w="12700">
-            <a:solidFill>
-              <a:prstClr val="black"/>
-            </a:solidFill>
-          </a:ln>
-        </p:spPr>
-        <p:txBody>
-          <a:bodyPr vert="horz" lIns="91440" tIns="45720" rIns="91440" bIns="45720" rtlCol="0" anchor="ctr"/>
-          <a:lstStyle/>
-          <a:p>
-            <a:endParaRPr lang="en-US"/>
-          </a:p>
-        </p:txBody>
-      </p:sp>
-      <p:sp>
-        <p:nvSpPr>
-          <p:cNvPr id="5" name="Notes Placeholder 4"/>
-          <p:cNvSpPr>
-            <a:spLocks noGrp="1"/>
-          </p:cNvSpPr>
-          <p:nvPr>
-            <p:ph type="body" sz="quarter" idx="3"/>
-          </p:nvPr>
-        </p:nvSpPr>
-        <p:spPr>
-          <a:xfrm>
-            <a:off x="685800" y="4400550"/>
-            <a:ext cx="5486400" cy="3600450"/>
-          </a:xfrm>
-          <a:prstGeom prst="rect">
-            <a:avLst/>
-          </a:prstGeom>
-        </p:spPr>
-        <p:txBody>
-          <a:bodyPr vert="horz" lIns="91440" tIns="45720" rIns="91440" bIns="45720" rtlCol="0"/>
-          <a:lstStyle/>
-          <a:p>
-            <a:pPr lvl="0"/>
-            <a:r>
-              <a:rPr lang="en-US"/>
-              <a:t>Click to edit Master text styles</a:t>
-            </a:r>
-          </a:p>
-          <a:p>
-            <a:pPr lvl="1"/>
-            <a:r>
-              <a:rPr lang="en-US"/>
-              <a:t>Second level</a:t>
-            </a:r>
-          </a:p>
-          <a:p>
-            <a:pPr lvl="2"/>
-            <a:r>
-              <a:rPr lang="en-US"/>
-              <a:t>Third level</a:t>
-            </a:r>
-          </a:p>
-          <a:p>
-            <a:pPr lvl="3"/>
-            <a:r>
-              <a:rPr lang="en-US"/>
-              <a:t>Fourth level</a:t>
-            </a:r>
-          </a:p>
-          <a:p>
-            <a:pPr lvl="4"/>
-            <a:r>
-              <a:rPr lang="en-US"/>
-              <a:t>Fifth level</a:t>
-            </a:r>
-          </a:p>
-        </p:txBody>
-      </p:sp>
-      <p:sp>
-        <p:nvSpPr>
-          <p:cNvPr id="6" name="Footer Placeholder 5"/>
-          <p:cNvSpPr>
-            <a:spLocks noGrp="1"/>
-          </p:cNvSpPr>
-          <p:nvPr>
-            <p:ph type="ftr" sz="quarter" idx="4"/>
-          </p:nvPr>
-        </p:nvSpPr>
-        <p:spPr>
-          <a:xfrm>
-            <a:off x="0" y="8685213"/>
-            <a:ext cx="2971800" cy="458787"/>
-          </a:xfrm>
-          <a:prstGeom prst="rect">
-            <a:avLst/>
-          </a:prstGeom>
-        </p:spPr>
-        <p:txBody>
-          <a:bodyPr vert="horz" lIns="91440" tIns="45720" rIns="91440" bIns="45720" rtlCol="0" anchor="b"/>
-          <a:lstStyle>
-            <a:lvl1pPr algn="l">
-              <a:defRPr sz="1200"/>
-            </a:lvl1pPr>
-          </a:lstStyle>
-          <a:p>
-            <a:endParaRPr lang="en-US"/>
-          </a:p>
-        </p:txBody>
-      </p:sp>
-      <p:sp>
-        <p:nvSpPr>
-          <p:cNvPr id="7" name="Slide Number Placeholder 6"/>
-          <p:cNvSpPr>
-            <a:spLocks noGrp="1"/>
-          </p:cNvSpPr>
-          <p:nvPr>
-            <p:ph type="sldNum" sz="quarter" idx="5"/>
-          </p:nvPr>
-        </p:nvSpPr>
-        <p:spPr>
-          <a:xfrm>
-            <a:off x="3884613" y="8685213"/>
-            <a:ext cx="2971800" cy="458787"/>
-          </a:xfrm>
-          <a:prstGeom prst="rect">
-            <a:avLst/>
-          </a:prstGeom>
-        </p:spPr>
-        <p:txBody>
-          <a:bodyPr vert="horz" lIns="91440" tIns="45720" rIns="91440" bIns="45720" rtlCol="0" anchor="b"/>
-          <a:lstStyle>
-            <a:lvl1pPr algn="r">
-              <a:defRPr sz="1200"/>
-            </a:lvl1pPr>
-          </a:lstStyle>
-          <a:p>
-            <a:fld id="{CE5E9CC1-C706-0F49-92D6-E571CC5EEA8F}" type="slidenum">
-              <a:rPr lang="en-US"/>
-              <a:t>‹#›</a:t>
-            </a:fld>
-            <a:endParaRPr lang="en-US"/>
-          </a:p>
-        </p:txBody>
-      </p:sp>
     </p:spTree>
     <p:extLst>
       <p:ext uri="{BB962C8B-B14F-4D97-AF65-F5344CB8AC3E}">
-        <p14:creationId xmlns:p14="http://schemas.microsoft.com/office/powerpoint/2010/main" val="1024086991"/>
+        <p14:creationId xmlns:p14="http://schemas.microsoft.com/office/powerpoint/2010/main" val="1435106662"/>
       </p:ext>
     </p:extLst>
   </p:cSld>
@@ -511,10 +292,6 @@
           <a:bodyPr/>
           <a:lstStyle/>
           <a:p>
-            <a:r>
-              <a:rPr lang="en-US" dirty="0"/>
-              <a:t/>
-            </a:r>
             <a:endParaRPr lang="en-US" dirty="0"/>
           </a:p>
         </p:txBody>
@@ -599,10 +376,6 @@
           <a:bodyPr/>
           <a:lstStyle/>
           <a:p>
-            <a:r>
-              <a:rPr lang="en-US" dirty="0"/>
-              <a:t/>
-            </a:r>
             <a:endParaRPr lang="en-US" dirty="0"/>
           </a:p>
         </p:txBody>
@@ -687,10 +460,6 @@
           <a:bodyPr/>
           <a:lstStyle/>
           <a:p>
-            <a:r>
-              <a:rPr lang="en-US" dirty="0"/>
-              <a:t/>
-            </a:r>
             <a:endParaRPr lang="en-US" dirty="0"/>
           </a:p>
         </p:txBody>
@@ -775,10 +544,6 @@
           <a:bodyPr/>
           <a:lstStyle/>
           <a:p>
-            <a:r>
-              <a:rPr lang="en-US" dirty="0"/>
-              <a:t/>
-            </a:r>
             <a:endParaRPr lang="en-US" dirty="0"/>
           </a:p>
         </p:txBody>
@@ -863,10 +628,6 @@
           <a:bodyPr/>
           <a:lstStyle/>
           <a:p>
-            <a:r>
-              <a:rPr lang="en-US" dirty="0"/>
-              <a:t/>
-            </a:r>
             <a:endParaRPr lang="en-US" dirty="0"/>
           </a:p>
         </p:txBody>
@@ -951,10 +712,6 @@
           <a:bodyPr/>
           <a:lstStyle/>
           <a:p>
-            <a:r>
-              <a:rPr lang="en-US" dirty="0"/>
-              <a:t/>
-            </a:r>
             <a:endParaRPr lang="en-US" dirty="0"/>
           </a:p>
         </p:txBody>
@@ -1039,10 +796,6 @@
           <a:bodyPr/>
           <a:lstStyle/>
           <a:p>
-            <a:r>
-              <a:rPr lang="en-US" dirty="0"/>
-              <a:t/>
-            </a:r>
             <a:endParaRPr lang="en-US" dirty="0"/>
           </a:p>
         </p:txBody>
@@ -1127,10 +880,6 @@
           <a:bodyPr/>
           <a:lstStyle/>
           <a:p>
-            <a:r>
-              <a:rPr lang="en-US" dirty="0"/>
-              <a:t/>
-            </a:r>
             <a:endParaRPr lang="en-US" dirty="0"/>
           </a:p>
         </p:txBody>
@@ -1215,10 +964,6 @@
           <a:bodyPr/>
           <a:lstStyle/>
           <a:p>
-            <a:r>
-              <a:rPr lang="en-US" dirty="0"/>
-              <a:t/>
-            </a:r>
             <a:endParaRPr lang="en-US" dirty="0"/>
           </a:p>
         </p:txBody>
@@ -1303,10 +1048,6 @@
           <a:bodyPr/>
           <a:lstStyle/>
           <a:p>
-            <a:r>
-              <a:rPr lang="en-US" dirty="0"/>
-              <a:t/>
-            </a:r>
             <a:endParaRPr lang="en-US" dirty="0"/>
           </a:p>
         </p:txBody>
@@ -1391,10 +1132,6 @@
           <a:bodyPr/>
           <a:lstStyle/>
           <a:p>
-            <a:r>
-              <a:rPr lang="en-US" dirty="0"/>
-              <a:t/>
-            </a:r>
             <a:endParaRPr lang="en-US" dirty="0"/>
           </a:p>
         </p:txBody>
@@ -1479,10 +1216,6 @@
           <a:bodyPr/>
           <a:lstStyle/>
           <a:p>
-            <a:r>
-              <a:rPr lang="en-US" dirty="0"/>
-              <a:t/>
-            </a:r>
             <a:endParaRPr lang="en-US" dirty="0"/>
           </a:p>
         </p:txBody>
@@ -1556,6 +1289,11 @@
 <file path=ppt/slideMasters/slideMaster1.xml><?xml version="1.0" encoding="utf-8"?>
 <p:sldMaster xmlns:a="http://schemas.openxmlformats.org/drawingml/2006/main" xmlns:r="http://schemas.openxmlformats.org/officeDocument/2006/relationships" xmlns:p="http://schemas.openxmlformats.org/presentationml/2006/main">
   <p:cSld>
+    <p:bg>
+      <p:bgRef idx="1001">
+        <a:schemeClr val="bg1"/>
+      </p:bgRef>
+    </p:bg>
     <p:spTree>
       <p:nvGrpSpPr>
         <p:cNvPr id="1" name=""/>
@@ -1838,6 +1576,7 @@
         <a:solidFill>
           <a:srgbClr val="FFFFFF"/>
         </a:solidFill>
+        <a:effectLst/>
       </p:bgPr>
     </p:bg>
     <p:spTree>
@@ -1875,7 +1614,7 @@
           <a:bodyPr wrap="square" lIns="0" tIns="0" rIns="0" bIns="0" rtlCol="0" anchor="ctr"/>
           <a:lstStyle/>
           <a:p>
-            <a:pPr indent="0" marL="0">
+            <a:pPr marL="0" indent="0">
               <a:buNone/>
             </a:pPr>
             <a:r>
@@ -1914,7 +1653,7 @@
           <a:bodyPr wrap="square" lIns="0" tIns="0" rIns="0" bIns="0" rtlCol="0" anchor="ctr"/>
           <a:lstStyle/>
           <a:p>
-            <a:pPr indent="0" marL="0">
+            <a:pPr marL="0" indent="0">
               <a:buNone/>
             </a:pPr>
             <a:r>
@@ -1950,7 +1689,7 @@
           <a:bodyPr wrap="square" lIns="0" tIns="0" rIns="0" bIns="0" rtlCol="0" anchor="ctr"/>
           <a:lstStyle/>
           <a:p>
-            <a:pPr indent="0" marL="0">
+            <a:pPr marL="0" indent="0">
               <a:buNone/>
             </a:pPr>
             <a:r>
@@ -1994,7 +1733,7 @@
           </a:bodyPr>
           <a:lstStyle/>
           <a:p>
-            <a:pPr indent="0" marL="0">
+            <a:pPr marL="0" indent="0">
               <a:buNone/>
             </a:pPr>
             <a:r>
@@ -2033,7 +1772,7 @@
           <a:bodyPr wrap="square" lIns="0" tIns="0" rIns="0" bIns="0" rtlCol="0" anchor="ctr"/>
           <a:lstStyle/>
           <a:p>
-            <a:pPr indent="0" marL="0">
+            <a:pPr marL="0" indent="0">
               <a:buNone/>
             </a:pPr>
             <a:r>
@@ -2077,7 +1816,7 @@
           </a:bodyPr>
           <a:lstStyle/>
           <a:p>
-            <a:pPr indent="0" marL="0">
+            <a:pPr marL="0" indent="0">
               <a:buNone/>
             </a:pPr>
             <a:r>
@@ -2094,7 +1833,7 @@
             <a:endParaRPr lang="en-US" sz="1800" dirty="0"/>
           </a:p>
           <a:p>
-            <a:pPr indent="0" marL="0">
+            <a:pPr marL="0" indent="0">
               <a:buNone/>
             </a:pPr>
             <a:r>
@@ -2111,7 +1850,7 @@
             <a:endParaRPr lang="en-US" sz="1800" dirty="0"/>
           </a:p>
           <a:p>
-            <a:pPr indent="0" marL="0">
+            <a:pPr marL="0" indent="0">
               <a:buNone/>
             </a:pPr>
             <a:r>
@@ -2128,7 +1867,7 @@
             <a:endParaRPr lang="en-US" sz="1800" dirty="0"/>
           </a:p>
           <a:p>
-            <a:pPr indent="0" marL="0">
+            <a:pPr marL="0" indent="0">
               <a:buNone/>
             </a:pPr>
             <a:r>
@@ -2175,7 +1914,7 @@
           </a:bodyPr>
           <a:lstStyle/>
           <a:p>
-            <a:pPr indent="0" marL="0">
+            <a:pPr marL="0" indent="0">
               <a:buNone/>
             </a:pPr>
             <a:r>
@@ -2211,7 +1950,7 @@
           <a:bodyPr wrap="square" lIns="0" tIns="0" rIns="0" bIns="0" rtlCol="0" anchor="ctr"/>
           <a:lstStyle/>
           <a:p>
-            <a:pPr indent="0" marL="0">
+            <a:pPr marL="0" indent="0">
               <a:buNone/>
             </a:pPr>
             <a:r>
@@ -2247,7 +1986,7 @@
           <a:bodyPr wrap="square" lIns="0" tIns="0" rIns="0" bIns="0" rtlCol="0" anchor="ctr"/>
           <a:lstStyle/>
           <a:p>
-            <a:pPr indent="0" marL="0">
+            <a:pPr marL="0" indent="0">
               <a:buNone/>
             </a:pPr>
             <a:r>
@@ -2283,7 +2022,7 @@
           <a:bodyPr wrap="square" lIns="0" tIns="0" rIns="0" bIns="0" rtlCol="0" anchor="ctr"/>
           <a:lstStyle/>
           <a:p>
-            <a:pPr algn="r" indent="0" marL="0">
+            <a:pPr marL="0" indent="0" algn="r">
               <a:buNone/>
             </a:pPr>
             <a:r>
@@ -2314,6 +2053,7 @@
         <a:solidFill>
           <a:srgbClr val="FFFFFF"/>
         </a:solidFill>
+        <a:effectLst/>
       </p:bgPr>
     </p:bg>
     <p:spTree>
@@ -2351,7 +2091,7 @@
           <a:bodyPr wrap="square" lIns="0" tIns="0" rIns="0" bIns="0" rtlCol="0" anchor="ctr"/>
           <a:lstStyle/>
           <a:p>
-            <a:pPr indent="0" marL="0">
+            <a:pPr marL="0" indent="0">
               <a:buNone/>
             </a:pPr>
             <a:r>
@@ -2392,7 +2132,7 @@
           </a:bodyPr>
           <a:lstStyle/>
           <a:p>
-            <a:pPr indent="0" marL="0">
+            <a:pPr marL="0" indent="0">
               <a:buNone/>
             </a:pPr>
             <a:r>
@@ -2454,7 +2194,7 @@
           <a:bodyPr wrap="square" lIns="0" tIns="0" rIns="0" bIns="0" rtlCol="0" anchor="ctr"/>
           <a:lstStyle/>
           <a:p>
-            <a:pPr indent="0" marL="0">
+            <a:pPr marL="0" indent="0">
               <a:buNone/>
             </a:pPr>
             <a:r>
@@ -2498,7 +2238,7 @@
           </a:bodyPr>
           <a:lstStyle/>
           <a:p>
-            <a:pPr indent="0" marL="0">
+            <a:pPr marL="0" indent="0">
               <a:buNone/>
             </a:pPr>
             <a:r>
@@ -2515,7 +2255,7 @@
             <a:endParaRPr lang="en-US" sz="1300" dirty="0"/>
           </a:p>
           <a:p>
-            <a:pPr indent="0" marL="0">
+            <a:pPr marL="0" indent="0">
               <a:buNone/>
             </a:pPr>
             <a:r>
@@ -2532,13 +2272,13 @@
             <a:endParaRPr lang="en-US" sz="1300" dirty="0"/>
           </a:p>
           <a:p>
-            <a:pPr indent="0" marL="0">
+            <a:pPr marL="0" indent="0">
               <a:buNone/>
             </a:pPr>
             <a:endParaRPr lang="en-US" sz="1300" dirty="0"/>
           </a:p>
           <a:p>
-            <a:pPr indent="0" marL="0">
+            <a:pPr marL="0" indent="0">
               <a:buNone/>
             </a:pPr>
             <a:r>
@@ -2555,7 +2295,7 @@
             <a:endParaRPr lang="en-US" sz="1300" dirty="0"/>
           </a:p>
           <a:p>
-            <a:pPr indent="0" marL="0">
+            <a:pPr marL="0" indent="0">
               <a:buNone/>
             </a:pPr>
             <a:r>
@@ -2572,13 +2312,13 @@
             <a:endParaRPr lang="en-US" sz="1300" dirty="0"/>
           </a:p>
           <a:p>
-            <a:pPr indent="0" marL="0">
+            <a:pPr marL="0" indent="0">
               <a:buNone/>
             </a:pPr>
             <a:endParaRPr lang="en-US" sz="1300" dirty="0"/>
           </a:p>
           <a:p>
-            <a:pPr indent="0" marL="0">
+            <a:pPr marL="0" indent="0">
               <a:buNone/>
             </a:pPr>
             <a:r>
@@ -2595,7 +2335,7 @@
             <a:endParaRPr lang="en-US" sz="1300" dirty="0"/>
           </a:p>
           <a:p>
-            <a:pPr indent="0" marL="0">
+            <a:pPr marL="0" indent="0">
               <a:buNone/>
             </a:pPr>
             <a:r>
@@ -2642,7 +2382,7 @@
           </a:bodyPr>
           <a:lstStyle/>
           <a:p>
-            <a:pPr indent="0" marL="0">
+            <a:pPr marL="0" indent="0">
               <a:buNone/>
             </a:pPr>
             <a:r>
@@ -2680,7 +2420,7 @@
           </a:bodyPr>
           <a:lstStyle/>
           <a:p>
-            <a:pPr indent="0" marL="0">
+            <a:pPr marL="0" indent="0">
               <a:buNone/>
             </a:pPr>
             <a:r>
@@ -2741,7 +2481,7 @@
           </a:bodyPr>
           <a:lstStyle/>
           <a:p>
-            <a:pPr indent="0" marL="0">
+            <a:pPr marL="0" indent="0">
               <a:buNone/>
             </a:pPr>
             <a:r>
@@ -2802,7 +2542,7 @@
           </a:bodyPr>
           <a:lstStyle/>
           <a:p>
-            <a:pPr indent="0" marL="0">
+            <a:pPr marL="0" indent="0">
               <a:buNone/>
             </a:pPr>
             <a:r>
@@ -2861,7 +2601,7 @@
           <a:bodyPr wrap="square" lIns="0" tIns="0" rIns="0" bIns="0" rtlCol="0" anchor="ctr"/>
           <a:lstStyle/>
           <a:p>
-            <a:pPr indent="0" marL="0">
+            <a:pPr marL="0" indent="0">
               <a:buNone/>
             </a:pPr>
             <a:r>
@@ -2897,7 +2637,7 @@
           <a:bodyPr wrap="square" lIns="0" tIns="0" rIns="0" bIns="0" rtlCol="0" anchor="ctr"/>
           <a:lstStyle/>
           <a:p>
-            <a:pPr algn="r" indent="0" marL="0">
+            <a:pPr marL="0" indent="0" algn="r">
               <a:buNone/>
             </a:pPr>
             <a:r>
@@ -2928,6 +2668,7 @@
         <a:solidFill>
           <a:srgbClr val="FFFFFF"/>
         </a:solidFill>
+        <a:effectLst/>
       </p:bgPr>
     </p:bg>
     <p:spTree>
@@ -2965,7 +2706,7 @@
           <a:bodyPr wrap="square" lIns="0" tIns="0" rIns="0" bIns="0" rtlCol="0" anchor="ctr"/>
           <a:lstStyle/>
           <a:p>
-            <a:pPr indent="0" marL="0">
+            <a:pPr marL="0" indent="0">
               <a:buNone/>
             </a:pPr>
             <a:r>
@@ -3006,7 +2747,7 @@
           </a:bodyPr>
           <a:lstStyle/>
           <a:p>
-            <a:pPr indent="0" marL="0">
+            <a:pPr marL="0" indent="0">
               <a:buNone/>
             </a:pPr>
             <a:r>
@@ -3070,7 +2811,7 @@
           </a:bodyPr>
           <a:lstStyle/>
           <a:p>
-            <a:pPr indent="0" marL="0">
+            <a:pPr marL="0" indent="0">
               <a:buNone/>
             </a:pPr>
             <a:r>
@@ -3131,7 +2872,7 @@
           </a:bodyPr>
           <a:lstStyle/>
           <a:p>
-            <a:pPr indent="0" marL="0">
+            <a:pPr marL="0" indent="0">
               <a:buNone/>
             </a:pPr>
             <a:r>
@@ -3192,7 +2933,7 @@
           </a:bodyPr>
           <a:lstStyle/>
           <a:p>
-            <a:pPr indent="0" marL="0">
+            <a:pPr marL="0" indent="0">
               <a:buNone/>
             </a:pPr>
             <a:r>
@@ -3253,7 +2994,7 @@
           </a:bodyPr>
           <a:lstStyle/>
           <a:p>
-            <a:pPr indent="0" marL="0">
+            <a:pPr marL="0" indent="0">
               <a:buNone/>
             </a:pPr>
             <a:r>
@@ -3314,7 +3055,7 @@
           </a:bodyPr>
           <a:lstStyle/>
           <a:p>
-            <a:pPr indent="0" marL="0">
+            <a:pPr marL="0" indent="0">
               <a:buNone/>
             </a:pPr>
             <a:r>
@@ -3375,7 +3116,7 @@
           </a:bodyPr>
           <a:lstStyle/>
           <a:p>
-            <a:pPr indent="0" marL="0">
+            <a:pPr marL="0" indent="0">
               <a:buNone/>
             </a:pPr>
             <a:r>
@@ -3436,7 +3177,7 @@
           </a:bodyPr>
           <a:lstStyle/>
           <a:p>
-            <a:pPr indent="0" marL="0">
+            <a:pPr marL="0" indent="0">
               <a:buNone/>
             </a:pPr>
             <a:r>
@@ -3497,7 +3238,7 @@
           </a:bodyPr>
           <a:lstStyle/>
           <a:p>
-            <a:pPr indent="0" marL="0">
+            <a:pPr marL="0" indent="0">
               <a:buNone/>
             </a:pPr>
             <a:r>
@@ -3558,7 +3299,7 @@
           </a:bodyPr>
           <a:lstStyle/>
           <a:p>
-            <a:pPr indent="0" marL="0">
+            <a:pPr marL="0" indent="0">
               <a:buNone/>
             </a:pPr>
             <a:r>
@@ -3619,7 +3360,7 @@
           </a:bodyPr>
           <a:lstStyle/>
           <a:p>
-            <a:pPr indent="0" marL="0">
+            <a:pPr marL="0" indent="0">
               <a:buNone/>
             </a:pPr>
             <a:r>
@@ -3686,7 +3427,7 @@
           </a:bodyPr>
           <a:lstStyle/>
           <a:p>
-            <a:pPr indent="0" marL="0">
+            <a:pPr marL="0" indent="0">
               <a:buNone/>
             </a:pPr>
             <a:r>
@@ -3722,7 +3463,7 @@
           <a:bodyPr wrap="square" lIns="0" tIns="0" rIns="0" bIns="0" rtlCol="0" anchor="ctr"/>
           <a:lstStyle/>
           <a:p>
-            <a:pPr indent="0" marL="0">
+            <a:pPr marL="0" indent="0">
               <a:buNone/>
             </a:pPr>
             <a:r>
@@ -3758,7 +3499,7 @@
           <a:bodyPr wrap="square" lIns="0" tIns="0" rIns="0" bIns="0" rtlCol="0" anchor="ctr"/>
           <a:lstStyle/>
           <a:p>
-            <a:pPr algn="r" indent="0" marL="0">
+            <a:pPr marL="0" indent="0" algn="r">
               <a:buNone/>
             </a:pPr>
             <a:r>
@@ -3789,6 +3530,7 @@
         <a:solidFill>
           <a:srgbClr val="FFFFFF"/>
         </a:solidFill>
+        <a:effectLst/>
       </p:bgPr>
     </p:bg>
     <p:spTree>
@@ -3826,7 +3568,7 @@
           <a:bodyPr wrap="square" lIns="0" tIns="0" rIns="0" bIns="0" rtlCol="0" anchor="ctr"/>
           <a:lstStyle/>
           <a:p>
-            <a:pPr indent="0" marL="0">
+            <a:pPr marL="0" indent="0">
               <a:buNone/>
             </a:pPr>
             <a:r>
@@ -3865,7 +3607,7 @@
           <a:bodyPr wrap="square" lIns="0" tIns="0" rIns="0" bIns="0" rtlCol="0" anchor="ctr"/>
           <a:lstStyle/>
           <a:p>
-            <a:pPr indent="0" marL="0">
+            <a:pPr marL="0" indent="0">
               <a:buNone/>
             </a:pPr>
             <a:r>
@@ -3909,7 +3651,7 @@
           </a:bodyPr>
           <a:lstStyle/>
           <a:p>
-            <a:pPr indent="0" marL="0">
+            <a:pPr marL="0" indent="0">
               <a:buNone/>
             </a:pPr>
             <a:r>
@@ -3948,7 +3690,7 @@
           <a:bodyPr wrap="square" lIns="0" tIns="0" rIns="0" bIns="0" rtlCol="0" anchor="ctr"/>
           <a:lstStyle/>
           <a:p>
-            <a:pPr indent="0" marL="0">
+            <a:pPr marL="0" indent="0">
               <a:buNone/>
             </a:pPr>
             <a:r>
@@ -3986,7 +3728,7 @@
           </a:bodyPr>
           <a:lstStyle/>
           <a:p>
-            <a:pPr indent="0" marL="0">
+            <a:pPr marL="0" indent="0">
               <a:buNone/>
             </a:pPr>
             <a:r>
@@ -4030,7 +3772,7 @@
           </a:bodyPr>
           <a:lstStyle/>
           <a:p>
-            <a:pPr indent="0" marL="0">
+            <a:pPr marL="0" indent="0">
               <a:buNone/>
             </a:pPr>
             <a:r>
@@ -4066,7 +3808,7 @@
           <a:bodyPr wrap="square" lIns="0" tIns="0" rIns="0" bIns="0" rtlCol="0" anchor="ctr"/>
           <a:lstStyle/>
           <a:p>
-            <a:pPr indent="0" marL="0">
+            <a:pPr marL="0" indent="0">
               <a:buNone/>
             </a:pPr>
             <a:r>
@@ -4102,7 +3844,7 @@
           <a:bodyPr wrap="square" lIns="0" tIns="0" rIns="0" bIns="0" rtlCol="0" anchor="ctr"/>
           <a:lstStyle/>
           <a:p>
-            <a:pPr algn="r" indent="0" marL="0">
+            <a:pPr marL="0" indent="0" algn="r">
               <a:buNone/>
             </a:pPr>
             <a:r>
@@ -4133,6 +3875,7 @@
         <a:solidFill>
           <a:srgbClr val="FFFFFF"/>
         </a:solidFill>
+        <a:effectLst/>
       </p:bgPr>
     </p:bg>
     <p:spTree>
@@ -4170,7 +3913,7 @@
           <a:bodyPr wrap="square" lIns="0" tIns="0" rIns="0" bIns="0" rtlCol="0" anchor="ctr"/>
           <a:lstStyle/>
           <a:p>
-            <a:pPr indent="0" marL="0">
+            <a:pPr marL="0" indent="0">
               <a:buNone/>
             </a:pPr>
             <a:r>
@@ -4211,7 +3954,7 @@
           </a:bodyPr>
           <a:lstStyle/>
           <a:p>
-            <a:pPr indent="0" marL="0">
+            <a:pPr marL="0" indent="0">
               <a:buNone/>
             </a:pPr>
             <a:r>
@@ -4283,7 +4026,7 @@
           </a:bodyPr>
           <a:lstStyle/>
           <a:p>
-            <a:pPr algn="ctr" indent="0" marL="0">
+            <a:pPr marL="0" indent="0" algn="ctr">
               <a:buNone/>
             </a:pPr>
             <a:r>
@@ -4329,7 +4072,7 @@
           </a:bodyPr>
           <a:lstStyle/>
           <a:p>
-            <a:pPr algn="ctr" indent="0" marL="0">
+            <a:pPr marL="0" indent="0" algn="ctr">
               <a:buNone/>
             </a:pPr>
             <a:r>
@@ -4375,7 +4118,7 @@
           </a:bodyPr>
           <a:lstStyle/>
           <a:p>
-            <a:pPr algn="ctr" indent="0" marL="0">
+            <a:pPr marL="0" indent="0" algn="ctr">
               <a:buNone/>
             </a:pPr>
             <a:r>
@@ -4421,7 +4164,7 @@
           </a:bodyPr>
           <a:lstStyle/>
           <a:p>
-            <a:pPr algn="ctr" indent="0" marL="0">
+            <a:pPr marL="0" indent="0" algn="ctr">
               <a:buNone/>
             </a:pPr>
             <a:r>
@@ -4467,7 +4210,7 @@
           </a:bodyPr>
           <a:lstStyle/>
           <a:p>
-            <a:pPr algn="ctr" indent="0" marL="0">
+            <a:pPr marL="0" indent="0" algn="ctr">
               <a:buNone/>
             </a:pPr>
             <a:r>
@@ -4505,7 +4248,7 @@
           </a:bodyPr>
           <a:lstStyle/>
           <a:p>
-            <a:pPr algn="ctr" indent="0" marL="0">
+            <a:pPr marL="0" indent="0" algn="ctr">
               <a:buNone/>
             </a:pPr>
             <a:r>
@@ -4543,7 +4286,7 @@
           </a:bodyPr>
           <a:lstStyle/>
           <a:p>
-            <a:pPr algn="ctr" indent="0" marL="0">
+            <a:pPr marL="0" indent="0" algn="ctr">
               <a:buNone/>
             </a:pPr>
             <a:r>
@@ -4587,7 +4330,7 @@
           </a:bodyPr>
           <a:lstStyle/>
           <a:p>
-            <a:pPr indent="0" marL="0">
+            <a:pPr marL="0" indent="0">
               <a:buNone/>
             </a:pPr>
             <a:r>
@@ -4623,7 +4366,7 @@
           <a:bodyPr wrap="square" lIns="0" tIns="0" rIns="0" bIns="0" rtlCol="0" anchor="ctr"/>
           <a:lstStyle/>
           <a:p>
-            <a:pPr indent="0" marL="0">
+            <a:pPr marL="0" indent="0">
               <a:buNone/>
             </a:pPr>
             <a:r>
@@ -4659,7 +4402,7 @@
           <a:bodyPr wrap="square" lIns="0" tIns="0" rIns="0" bIns="0" rtlCol="0" anchor="ctr"/>
           <a:lstStyle/>
           <a:p>
-            <a:pPr algn="r" indent="0" marL="0">
+            <a:pPr marL="0" indent="0" algn="r">
               <a:buNone/>
             </a:pPr>
             <a:r>
@@ -4690,6 +4433,7 @@
         <a:solidFill>
           <a:srgbClr val="FFFFFF"/>
         </a:solidFill>
+        <a:effectLst/>
       </p:bgPr>
     </p:bg>
     <p:spTree>
@@ -4727,7 +4471,7 @@
           <a:bodyPr wrap="square" lIns="0" tIns="0" rIns="0" bIns="0" rtlCol="0" anchor="ctr"/>
           <a:lstStyle/>
           <a:p>
-            <a:pPr indent="0" marL="0">
+            <a:pPr marL="0" indent="0">
               <a:buNone/>
             </a:pPr>
             <a:r>
@@ -4768,7 +4512,7 @@
           </a:bodyPr>
           <a:lstStyle/>
           <a:p>
-            <a:pPr indent="0" marL="0">
+            <a:pPr marL="0" indent="0">
               <a:buNone/>
             </a:pPr>
             <a:r>
@@ -4840,7 +4584,7 @@
           </a:bodyPr>
           <a:lstStyle/>
           <a:p>
-            <a:pPr indent="0" marL="0">
+            <a:pPr marL="0" indent="0">
               <a:buNone/>
             </a:pPr>
             <a:r>
@@ -4851,9 +4595,6 @@
               </a:rPr>
               <a:t>1  </a:t>
             </a:r>
-            <a:pPr indent="0" marL="0">
-              <a:buNone/>
-            </a:pPr>
             <a:r>
               <a:rPr lang="en-US" sz="1250" b="1" dirty="0">
                 <a:solidFill>
@@ -4863,9 +4604,6 @@
               <a:t>Fork
 </a:t>
             </a:r>
-            <a:pPr indent="0" marL="0">
-              <a:buNone/>
-            </a:pPr>
             <a:r>
               <a:rPr lang="en-US" sz="1250" dirty="0">
                 <a:solidFill>
@@ -4899,7 +4637,7 @@
           <a:bodyPr wrap="square" lIns="0" tIns="0" rIns="0" bIns="0" rtlCol="0" anchor="ctr"/>
           <a:lstStyle/>
           <a:p>
-            <a:pPr indent="0" marL="0">
+            <a:pPr marL="0" indent="0">
               <a:buNone/>
             </a:pPr>
             <a:r>
@@ -4945,7 +4683,7 @@
           </a:bodyPr>
           <a:lstStyle/>
           <a:p>
-            <a:pPr indent="0" marL="0">
+            <a:pPr marL="0" indent="0">
               <a:buNone/>
             </a:pPr>
             <a:r>
@@ -4956,9 +4694,6 @@
               </a:rPr>
               <a:t>2  </a:t>
             </a:r>
-            <a:pPr indent="0" marL="0">
-              <a:buNone/>
-            </a:pPr>
             <a:r>
               <a:rPr lang="en-US" sz="1250" b="1" dirty="0">
                 <a:solidFill>
@@ -4968,9 +4703,6 @@
               <a:t>Clone
 </a:t>
             </a:r>
-            <a:pPr indent="0" marL="0">
-              <a:buNone/>
-            </a:pPr>
             <a:r>
               <a:rPr lang="en-US" sz="1250" dirty="0">
                 <a:solidFill>
@@ -5004,7 +4736,7 @@
           <a:bodyPr wrap="square" lIns="0" tIns="0" rIns="0" bIns="0" rtlCol="0" anchor="ctr"/>
           <a:lstStyle/>
           <a:p>
-            <a:pPr indent="0" marL="0">
+            <a:pPr marL="0" indent="0">
               <a:buNone/>
             </a:pPr>
             <a:r>
@@ -5050,7 +4782,7 @@
           </a:bodyPr>
           <a:lstStyle/>
           <a:p>
-            <a:pPr indent="0" marL="0">
+            <a:pPr marL="0" indent="0">
               <a:buNone/>
             </a:pPr>
             <a:r>
@@ -5061,9 +4793,6 @@
               </a:rPr>
               <a:t>3  </a:t>
             </a:r>
-            <a:pPr indent="0" marL="0">
-              <a:buNone/>
-            </a:pPr>
             <a:r>
               <a:rPr lang="en-US" sz="1250" b="1" dirty="0">
                 <a:solidFill>
@@ -5073,9 +4802,6 @@
               <a:t>Open
 </a:t>
             </a:r>
-            <a:pPr indent="0" marL="0">
-              <a:buNone/>
-            </a:pPr>
             <a:r>
               <a:rPr lang="en-US" sz="1250" dirty="0">
                 <a:solidFill>
@@ -5109,7 +4835,7 @@
           <a:bodyPr wrap="square" lIns="0" tIns="0" rIns="0" bIns="0" rtlCol="0" anchor="ctr"/>
           <a:lstStyle/>
           <a:p>
-            <a:pPr indent="0" marL="0">
+            <a:pPr marL="0" indent="0">
               <a:buNone/>
             </a:pPr>
             <a:r>
@@ -5155,7 +4881,7 @@
           </a:bodyPr>
           <a:lstStyle/>
           <a:p>
-            <a:pPr indent="0" marL="0">
+            <a:pPr marL="0" indent="0">
               <a:buNone/>
             </a:pPr>
             <a:r>
@@ -5166,9 +4892,6 @@
               </a:rPr>
               <a:t>4  </a:t>
             </a:r>
-            <a:pPr indent="0" marL="0">
-              <a:buNone/>
-            </a:pPr>
             <a:r>
               <a:rPr lang="en-US" sz="1250" b="1" dirty="0">
                 <a:solidFill>
@@ -5178,9 +4901,6 @@
               <a:t>Create
 </a:t>
             </a:r>
-            <a:pPr indent="0" marL="0">
-              <a:buNone/>
-            </a:pPr>
             <a:r>
               <a:rPr lang="en-US" sz="1250" dirty="0">
                 <a:solidFill>
@@ -5214,7 +4934,7 @@
           <a:bodyPr wrap="square" lIns="0" tIns="0" rIns="0" bIns="0" rtlCol="0" anchor="ctr"/>
           <a:lstStyle/>
           <a:p>
-            <a:pPr indent="0" marL="0">
+            <a:pPr marL="0" indent="0">
               <a:buNone/>
             </a:pPr>
             <a:r>
@@ -5260,7 +4980,7 @@
           </a:bodyPr>
           <a:lstStyle/>
           <a:p>
-            <a:pPr indent="0" marL="0">
+            <a:pPr marL="0" indent="0">
               <a:buNone/>
             </a:pPr>
             <a:r>
@@ -5271,9 +4991,6 @@
               </a:rPr>
               <a:t>5  </a:t>
             </a:r>
-            <a:pPr indent="0" marL="0">
-              <a:buNone/>
-            </a:pPr>
             <a:r>
               <a:rPr lang="en-US" sz="1250" b="1" dirty="0">
                 <a:solidFill>
@@ -5283,9 +5000,6 @@
               <a:t>Publish
 </a:t>
             </a:r>
-            <a:pPr indent="0" marL="0">
-              <a:buNone/>
-            </a:pPr>
             <a:r>
               <a:rPr lang="en-US" sz="1250" dirty="0">
                 <a:solidFill>
@@ -5327,7 +5041,7 @@
           </a:bodyPr>
           <a:lstStyle/>
           <a:p>
-            <a:pPr indent="0" marL="0">
+            <a:pPr marL="0" indent="0">
               <a:buNone/>
             </a:pPr>
             <a:r>
@@ -5344,7 +5058,7 @@
             <a:endParaRPr lang="en-US" sz="1900" dirty="0"/>
           </a:p>
           <a:p>
-            <a:pPr indent="0" marL="0">
+            <a:pPr marL="0" indent="0">
               <a:buNone/>
             </a:pPr>
             <a:r>
@@ -5385,7 +5099,7 @@
           </a:bodyPr>
           <a:lstStyle/>
           <a:p>
-            <a:pPr indent="0" marL="0">
+            <a:pPr marL="0" indent="0">
               <a:buNone/>
             </a:pPr>
             <a:r>
@@ -5421,7 +5135,7 @@
           <a:bodyPr wrap="square" lIns="0" tIns="0" rIns="0" bIns="0" rtlCol="0" anchor="ctr"/>
           <a:lstStyle/>
           <a:p>
-            <a:pPr indent="0" marL="0">
+            <a:pPr marL="0" indent="0">
               <a:buNone/>
             </a:pPr>
             <a:r>
@@ -5457,7 +5171,7 @@
           <a:bodyPr wrap="square" lIns="0" tIns="0" rIns="0" bIns="0" rtlCol="0" anchor="ctr"/>
           <a:lstStyle/>
           <a:p>
-            <a:pPr indent="0" marL="0">
+            <a:pPr marL="0" indent="0">
               <a:buNone/>
             </a:pPr>
             <a:r>
@@ -5493,7 +5207,7 @@
           <a:bodyPr wrap="square" lIns="0" tIns="0" rIns="0" bIns="0" rtlCol="0" anchor="ctr"/>
           <a:lstStyle/>
           <a:p>
-            <a:pPr algn="r" indent="0" marL="0">
+            <a:pPr marL="0" indent="0" algn="r">
               <a:buNone/>
             </a:pPr>
             <a:r>
@@ -5524,6 +5238,7 @@
         <a:solidFill>
           <a:srgbClr val="FFFFFF"/>
         </a:solidFill>
+        <a:effectLst/>
       </p:bgPr>
     </p:bg>
     <p:spTree>
@@ -5561,7 +5276,7 @@
           <a:bodyPr wrap="square" lIns="0" tIns="0" rIns="0" bIns="0" rtlCol="0" anchor="ctr"/>
           <a:lstStyle/>
           <a:p>
-            <a:pPr indent="0" marL="0">
+            <a:pPr marL="0" indent="0">
               <a:buNone/>
             </a:pPr>
             <a:r>
@@ -5602,7 +5317,7 @@
           </a:bodyPr>
           <a:lstStyle/>
           <a:p>
-            <a:pPr indent="0" marL="0">
+            <a:pPr marL="0" indent="0">
               <a:buNone/>
             </a:pPr>
             <a:r>
@@ -5672,7 +5387,7 @@
           </a:bodyPr>
           <a:lstStyle/>
           <a:p>
-            <a:pPr indent="0" marL="0">
+            <a:pPr marL="0" indent="0">
               <a:buNone/>
             </a:pPr>
             <a:r>
@@ -5689,13 +5404,13 @@
             <a:endParaRPr lang="en-US" sz="1500" dirty="0"/>
           </a:p>
           <a:p>
-            <a:pPr indent="0" marL="0">
+            <a:pPr marL="0" indent="0">
               <a:buNone/>
             </a:pPr>
             <a:endParaRPr lang="en-US" sz="1500" dirty="0"/>
           </a:p>
           <a:p>
-            <a:pPr indent="0" marL="0">
+            <a:pPr marL="0" indent="0">
               <a:buNone/>
             </a:pPr>
             <a:r>
@@ -5736,7 +5451,7 @@
           </a:bodyPr>
           <a:lstStyle/>
           <a:p>
-            <a:pPr indent="0" marL="0">
+            <a:pPr marL="0" indent="0">
               <a:buNone/>
             </a:pPr>
             <a:r>
@@ -5772,7 +5487,7 @@
           <a:bodyPr wrap="square" lIns="0" tIns="0" rIns="0" bIns="0" rtlCol="0" anchor="ctr"/>
           <a:lstStyle/>
           <a:p>
-            <a:pPr indent="0" marL="0">
+            <a:pPr marL="0" indent="0">
               <a:buNone/>
             </a:pPr>
             <a:r>
@@ -5816,7 +5531,7 @@
           </a:bodyPr>
           <a:lstStyle/>
           <a:p>
-            <a:pPr indent="0" marL="0">
+            <a:pPr marL="0" indent="0">
               <a:buNone/>
             </a:pPr>
             <a:r>
@@ -5857,7 +5572,7 @@
           </a:bodyPr>
           <a:lstStyle/>
           <a:p>
-            <a:pPr indent="0" marL="0">
+            <a:pPr marL="0" indent="0">
               <a:buNone/>
             </a:pPr>
             <a:r>
@@ -5918,7 +5633,7 @@
           </a:bodyPr>
           <a:lstStyle/>
           <a:p>
-            <a:pPr indent="0" marL="0">
+            <a:pPr marL="0" indent="0">
               <a:buNone/>
             </a:pPr>
             <a:r>
@@ -5979,7 +5694,7 @@
           </a:bodyPr>
           <a:lstStyle/>
           <a:p>
-            <a:pPr indent="0" marL="0">
+            <a:pPr marL="0" indent="0">
               <a:buNone/>
             </a:pPr>
             <a:r>
@@ -6046,7 +5761,7 @@
           </a:bodyPr>
           <a:lstStyle/>
           <a:p>
-            <a:pPr indent="0" marL="0">
+            <a:pPr marL="0" indent="0">
               <a:buNone/>
             </a:pPr>
             <a:r>
@@ -6082,7 +5797,7 @@
           <a:bodyPr wrap="square" lIns="0" tIns="0" rIns="0" bIns="0" rtlCol="0" anchor="ctr"/>
           <a:lstStyle/>
           <a:p>
-            <a:pPr indent="0" marL="0">
+            <a:pPr marL="0" indent="0">
               <a:buNone/>
             </a:pPr>
             <a:r>
@@ -6118,7 +5833,7 @@
           <a:bodyPr wrap="square" lIns="0" tIns="0" rIns="0" bIns="0" rtlCol="0" anchor="ctr"/>
           <a:lstStyle/>
           <a:p>
-            <a:pPr algn="r" indent="0" marL="0">
+            <a:pPr marL="0" indent="0" algn="r">
               <a:buNone/>
             </a:pPr>
             <a:r>
@@ -6149,6 +5864,7 @@
         <a:solidFill>
           <a:srgbClr val="FFFFFF"/>
         </a:solidFill>
+        <a:effectLst/>
       </p:bgPr>
     </p:bg>
     <p:spTree>
@@ -6186,7 +5902,7 @@
           <a:bodyPr wrap="square" lIns="0" tIns="0" rIns="0" bIns="0" rtlCol="0" anchor="ctr"/>
           <a:lstStyle/>
           <a:p>
-            <a:pPr indent="0" marL="0">
+            <a:pPr marL="0" indent="0">
               <a:buNone/>
             </a:pPr>
             <a:r>
@@ -6227,7 +5943,7 @@
           </a:bodyPr>
           <a:lstStyle/>
           <a:p>
-            <a:pPr indent="0" marL="0">
+            <a:pPr marL="0" indent="0">
               <a:buNone/>
             </a:pPr>
             <a:r>
@@ -6297,7 +6013,7 @@
           </a:bodyPr>
           <a:lstStyle/>
           <a:p>
-            <a:pPr indent="0" marL="0">
+            <a:pPr marL="0" indent="0">
               <a:buNone/>
             </a:pPr>
             <a:r>
@@ -6314,7 +6030,7 @@
             <a:endParaRPr lang="en-US" sz="1700" dirty="0"/>
           </a:p>
           <a:p>
-            <a:pPr indent="0" marL="0">
+            <a:pPr marL="0" indent="0">
               <a:buNone/>
             </a:pPr>
             <a:r>
@@ -6331,7 +6047,7 @@
             <a:endParaRPr lang="en-US" sz="1700" dirty="0"/>
           </a:p>
           <a:p>
-            <a:pPr indent="0" marL="0">
+            <a:pPr marL="0" indent="0">
               <a:buNone/>
             </a:pPr>
             <a:r>
@@ -6370,7 +6086,7 @@
           <a:bodyPr wrap="square" lIns="0" tIns="0" rIns="0" bIns="0" rtlCol="0" anchor="ctr"/>
           <a:lstStyle/>
           <a:p>
-            <a:pPr indent="0" marL="0">
+            <a:pPr marL="0" indent="0">
               <a:buNone/>
             </a:pPr>
             <a:r>
@@ -6408,7 +6124,7 @@
           </a:bodyPr>
           <a:lstStyle/>
           <a:p>
-            <a:pPr indent="0" marL="0">
+            <a:pPr marL="0" indent="0">
               <a:buNone/>
             </a:pPr>
             <a:r>
@@ -6469,7 +6185,7 @@
           </a:bodyPr>
           <a:lstStyle/>
           <a:p>
-            <a:pPr indent="0" marL="0">
+            <a:pPr marL="0" indent="0">
               <a:buNone/>
             </a:pPr>
             <a:r>
@@ -6530,7 +6246,7 @@
           </a:bodyPr>
           <a:lstStyle/>
           <a:p>
-            <a:pPr indent="0" marL="0">
+            <a:pPr marL="0" indent="0">
               <a:buNone/>
             </a:pPr>
             <a:r>
@@ -6597,7 +6313,7 @@
           </a:bodyPr>
           <a:lstStyle/>
           <a:p>
-            <a:pPr indent="0" marL="0">
+            <a:pPr marL="0" indent="0">
               <a:buNone/>
             </a:pPr>
             <a:r>
@@ -6633,7 +6349,7 @@
           <a:bodyPr wrap="square" lIns="0" tIns="0" rIns="0" bIns="0" rtlCol="0" anchor="ctr"/>
           <a:lstStyle/>
           <a:p>
-            <a:pPr indent="0" marL="0">
+            <a:pPr marL="0" indent="0">
               <a:buNone/>
             </a:pPr>
             <a:r>
@@ -6677,7 +6393,7 @@
           </a:bodyPr>
           <a:lstStyle/>
           <a:p>
-            <a:pPr indent="0" marL="0">
+            <a:pPr marL="0" indent="0">
               <a:buNone/>
             </a:pPr>
             <a:r>
@@ -6716,7 +6432,7 @@
           <a:bodyPr wrap="square" lIns="0" tIns="0" rIns="0" bIns="0" rtlCol="0" anchor="ctr"/>
           <a:lstStyle/>
           <a:p>
-            <a:pPr indent="0" marL="0">
+            <a:pPr marL="0" indent="0">
               <a:buNone/>
             </a:pPr>
             <a:r>
@@ -6752,7 +6468,7 @@
           <a:bodyPr wrap="square" lIns="0" tIns="0" rIns="0" bIns="0" rtlCol="0" anchor="ctr"/>
           <a:lstStyle/>
           <a:p>
-            <a:pPr algn="r" indent="0" marL="0">
+            <a:pPr marL="0" indent="0" algn="r">
               <a:buNone/>
             </a:pPr>
             <a:r>
@@ -6783,6 +6499,7 @@
         <a:solidFill>
           <a:srgbClr val="FFFFFF"/>
         </a:solidFill>
+        <a:effectLst/>
       </p:bgPr>
     </p:bg>
     <p:spTree>
@@ -6820,7 +6537,7 @@
           <a:bodyPr wrap="square" lIns="0" tIns="0" rIns="0" bIns="0" rtlCol="0" anchor="ctr"/>
           <a:lstStyle/>
           <a:p>
-            <a:pPr indent="0" marL="0">
+            <a:pPr marL="0" indent="0">
               <a:buNone/>
             </a:pPr>
             <a:r>
@@ -6861,7 +6578,7 @@
           </a:bodyPr>
           <a:lstStyle/>
           <a:p>
-            <a:pPr indent="0" marL="0">
+            <a:pPr marL="0" indent="0">
               <a:buNone/>
             </a:pPr>
             <a:r>
@@ -6923,7 +6640,7 @@
           <a:bodyPr wrap="square" lIns="0" tIns="0" rIns="0" bIns="0" rtlCol="0" anchor="ctr"/>
           <a:lstStyle/>
           <a:p>
-            <a:pPr indent="0" marL="0">
+            <a:pPr marL="0" indent="0">
               <a:buNone/>
             </a:pPr>
             <a:r>
@@ -6967,7 +6684,7 @@
           </a:bodyPr>
           <a:lstStyle/>
           <a:p>
-            <a:pPr indent="0" marL="0">
+            <a:pPr marL="0" indent="0">
               <a:buNone/>
             </a:pPr>
             <a:r>
@@ -6984,13 +6701,13 @@
             <a:endParaRPr lang="en-US" sz="2000" dirty="0"/>
           </a:p>
           <a:p>
-            <a:pPr indent="0" marL="0">
+            <a:pPr marL="0" indent="0">
               <a:buNone/>
             </a:pPr>
             <a:endParaRPr lang="en-US" sz="2000" dirty="0"/>
           </a:p>
           <a:p>
-            <a:pPr indent="0" marL="0">
+            <a:pPr marL="0" indent="0">
               <a:buNone/>
             </a:pPr>
             <a:r>
@@ -7037,7 +6754,7 @@
           </a:bodyPr>
           <a:lstStyle/>
           <a:p>
-            <a:pPr indent="0" marL="0">
+            <a:pPr marL="0" indent="0">
               <a:buNone/>
             </a:pPr>
             <a:r>
@@ -7075,7 +6792,7 @@
           </a:bodyPr>
           <a:lstStyle/>
           <a:p>
-            <a:pPr indent="0" marL="0">
+            <a:pPr marL="0" indent="0">
               <a:buNone/>
             </a:pPr>
             <a:r>
@@ -7113,7 +6830,7 @@
           </a:bodyPr>
           <a:lstStyle/>
           <a:p>
-            <a:pPr indent="0" marL="0">
+            <a:pPr marL="0" indent="0">
               <a:buNone/>
             </a:pPr>
             <a:r>
@@ -7174,7 +6891,7 @@
           </a:bodyPr>
           <a:lstStyle/>
           <a:p>
-            <a:pPr indent="0" marL="0">
+            <a:pPr marL="0" indent="0">
               <a:buNone/>
             </a:pPr>
             <a:r>
@@ -7235,7 +6952,7 @@
           </a:bodyPr>
           <a:lstStyle/>
           <a:p>
-            <a:pPr indent="0" marL="0">
+            <a:pPr marL="0" indent="0">
               <a:buNone/>
             </a:pPr>
             <a:r>
@@ -7294,7 +7011,7 @@
           <a:bodyPr wrap="square" lIns="0" tIns="0" rIns="0" bIns="0" rtlCol="0" anchor="ctr"/>
           <a:lstStyle/>
           <a:p>
-            <a:pPr indent="0" marL="0">
+            <a:pPr marL="0" indent="0">
               <a:buNone/>
             </a:pPr>
             <a:r>
@@ -7330,7 +7047,7 @@
           <a:bodyPr wrap="square" lIns="0" tIns="0" rIns="0" bIns="0" rtlCol="0" anchor="ctr"/>
           <a:lstStyle/>
           <a:p>
-            <a:pPr algn="r" indent="0" marL="0">
+            <a:pPr marL="0" indent="0" algn="r">
               <a:buNone/>
             </a:pPr>
             <a:r>
@@ -7361,6 +7078,7 @@
         <a:solidFill>
           <a:srgbClr val="FFFFFF"/>
         </a:solidFill>
+        <a:effectLst/>
       </p:bgPr>
     </p:bg>
     <p:spTree>
@@ -7398,7 +7116,7 @@
           <a:bodyPr wrap="square" lIns="0" tIns="0" rIns="0" bIns="0" rtlCol="0" anchor="ctr"/>
           <a:lstStyle/>
           <a:p>
-            <a:pPr indent="0" marL="0">
+            <a:pPr marL="0" indent="0">
               <a:buNone/>
             </a:pPr>
             <a:r>
@@ -7439,7 +7157,7 @@
           </a:bodyPr>
           <a:lstStyle/>
           <a:p>
-            <a:pPr indent="0" marL="0">
+            <a:pPr marL="0" indent="0">
               <a:buNone/>
             </a:pPr>
             <a:r>
@@ -7509,7 +7227,7 @@
           </a:bodyPr>
           <a:lstStyle/>
           <a:p>
-            <a:pPr indent="0" marL="0">
+            <a:pPr marL="0" indent="0">
               <a:buNone/>
             </a:pPr>
             <a:r>
@@ -7526,7 +7244,7 @@
             <a:endParaRPr lang="en-US" sz="2000" dirty="0"/>
           </a:p>
           <a:p>
-            <a:pPr indent="0" marL="0">
+            <a:pPr marL="0" indent="0">
               <a:buNone/>
             </a:pPr>
             <a:r>
@@ -7543,7 +7261,7 @@
             <a:endParaRPr lang="en-US" sz="2000" dirty="0"/>
           </a:p>
           <a:p>
-            <a:pPr indent="0" marL="0">
+            <a:pPr marL="0" indent="0">
               <a:buNone/>
             </a:pPr>
             <a:r>
@@ -7560,7 +7278,7 @@
             <a:endParaRPr lang="en-US" sz="2000" dirty="0"/>
           </a:p>
           <a:p>
-            <a:pPr indent="0" marL="0">
+            <a:pPr marL="0" indent="0">
               <a:buNone/>
             </a:pPr>
             <a:r>
@@ -7599,7 +7317,7 @@
           <a:bodyPr wrap="square" lIns="0" tIns="0" rIns="0" bIns="0" rtlCol="0" anchor="ctr"/>
           <a:lstStyle/>
           <a:p>
-            <a:pPr indent="0" marL="0">
+            <a:pPr marL="0" indent="0">
               <a:buNone/>
             </a:pPr>
             <a:r>
@@ -7637,7 +7355,7 @@
           </a:bodyPr>
           <a:lstStyle/>
           <a:p>
-            <a:pPr indent="0" marL="0">
+            <a:pPr marL="0" indent="0">
               <a:buNone/>
             </a:pPr>
             <a:r>
@@ -7698,7 +7416,7 @@
           </a:bodyPr>
           <a:lstStyle/>
           <a:p>
-            <a:pPr indent="0" marL="0">
+            <a:pPr marL="0" indent="0">
               <a:buNone/>
             </a:pPr>
             <a:r>
@@ -7759,7 +7477,7 @@
           </a:bodyPr>
           <a:lstStyle/>
           <a:p>
-            <a:pPr indent="0" marL="0">
+            <a:pPr marL="0" indent="0">
               <a:buNone/>
             </a:pPr>
             <a:r>
@@ -7820,7 +7538,7 @@
           </a:bodyPr>
           <a:lstStyle/>
           <a:p>
-            <a:pPr indent="0" marL="0">
+            <a:pPr marL="0" indent="0">
               <a:buNone/>
             </a:pPr>
             <a:r>
@@ -7887,7 +7605,7 @@
           </a:bodyPr>
           <a:lstStyle/>
           <a:p>
-            <a:pPr indent="0" marL="0">
+            <a:pPr marL="0" indent="0">
               <a:buNone/>
             </a:pPr>
             <a:r>
@@ -7923,7 +7641,7 @@
           <a:bodyPr wrap="square" lIns="0" tIns="0" rIns="0" bIns="0" rtlCol="0" anchor="ctr"/>
           <a:lstStyle/>
           <a:p>
-            <a:pPr indent="0" marL="0">
+            <a:pPr marL="0" indent="0">
               <a:buNone/>
             </a:pPr>
             <a:r>
@@ -7959,7 +7677,7 @@
           <a:bodyPr wrap="square" lIns="0" tIns="0" rIns="0" bIns="0" rtlCol="0" anchor="ctr"/>
           <a:lstStyle/>
           <a:p>
-            <a:pPr algn="r" indent="0" marL="0">
+            <a:pPr marL="0" indent="0" algn="r">
               <a:buNone/>
             </a:pPr>
             <a:r>
@@ -7990,6 +7708,7 @@
         <a:solidFill>
           <a:srgbClr val="FFFFFF"/>
         </a:solidFill>
+        <a:effectLst/>
       </p:bgPr>
     </p:bg>
     <p:spTree>
@@ -8027,7 +7746,7 @@
           <a:bodyPr wrap="square" lIns="0" tIns="0" rIns="0" bIns="0" rtlCol="0" anchor="ctr"/>
           <a:lstStyle/>
           <a:p>
-            <a:pPr indent="0" marL="0">
+            <a:pPr marL="0" indent="0">
               <a:buNone/>
             </a:pPr>
             <a:r>
@@ -8068,7 +7787,7 @@
           </a:bodyPr>
           <a:lstStyle/>
           <a:p>
-            <a:pPr indent="0" marL="0">
+            <a:pPr marL="0" indent="0">
               <a:buNone/>
             </a:pPr>
             <a:r>
@@ -8117,7 +7836,7 @@
         </p:nvSpPr>
         <p:spPr>
           <a:xfrm>
-            <a:off x="777240" y="1353312"/>
+            <a:off x="777240" y="1719072"/>
             <a:ext cx="5486400" cy="4709160"/>
           </a:xfrm>
           <a:prstGeom prst="rect">
@@ -8138,7 +7857,7 @@
           </a:bodyPr>
           <a:lstStyle/>
           <a:p>
-            <a:pPr indent="0" marL="0">
+            <a:pPr marL="0" indent="0">
               <a:buNone/>
             </a:pPr>
             <a:r>
@@ -8155,13 +7874,13 @@
             <a:endParaRPr lang="en-US" sz="1120" dirty="0"/>
           </a:p>
           <a:p>
-            <a:pPr indent="0" marL="0">
+            <a:pPr marL="0" indent="0">
               <a:buNone/>
             </a:pPr>
             <a:endParaRPr lang="en-US" sz="1120" dirty="0"/>
           </a:p>
           <a:p>
-            <a:pPr indent="0" marL="0">
+            <a:pPr marL="0" indent="0">
               <a:buNone/>
             </a:pPr>
             <a:r>
@@ -8178,7 +7897,7 @@
             <a:endParaRPr lang="en-US" sz="1120" dirty="0"/>
           </a:p>
           <a:p>
-            <a:pPr indent="0" marL="0">
+            <a:pPr marL="0" indent="0">
               <a:buNone/>
             </a:pPr>
             <a:r>
@@ -8195,7 +7914,7 @@
             <a:endParaRPr lang="en-US" sz="1120" dirty="0"/>
           </a:p>
           <a:p>
-            <a:pPr indent="0" marL="0">
+            <a:pPr marL="0" indent="0">
               <a:buNone/>
             </a:pPr>
             <a:r>
@@ -8212,7 +7931,7 @@
             <a:endParaRPr lang="en-US" sz="1120" dirty="0"/>
           </a:p>
           <a:p>
-            <a:pPr indent="0" marL="0">
+            <a:pPr marL="0" indent="0">
               <a:buNone/>
             </a:pPr>
             <a:r>
@@ -8229,13 +7948,13 @@
             <a:endParaRPr lang="en-US" sz="1120" dirty="0"/>
           </a:p>
           <a:p>
-            <a:pPr indent="0" marL="0">
+            <a:pPr marL="0" indent="0">
               <a:buNone/>
             </a:pPr>
             <a:endParaRPr lang="en-US" sz="1120" dirty="0"/>
           </a:p>
           <a:p>
-            <a:pPr indent="0" marL="0">
+            <a:pPr marL="0" indent="0">
               <a:buNone/>
             </a:pPr>
             <a:r>
@@ -8252,7 +7971,7 @@
             <a:endParaRPr lang="en-US" sz="1120" dirty="0"/>
           </a:p>
           <a:p>
-            <a:pPr indent="0" marL="0">
+            <a:pPr marL="0" indent="0">
               <a:buNone/>
             </a:pPr>
             <a:r>
@@ -8269,7 +7988,7 @@
             <a:endParaRPr lang="en-US" sz="1120" dirty="0"/>
           </a:p>
           <a:p>
-            <a:pPr indent="0" marL="0">
+            <a:pPr marL="0" indent="0">
               <a:buNone/>
             </a:pPr>
             <a:r>
@@ -8286,7 +8005,7 @@
             <a:endParaRPr lang="en-US" sz="1120" dirty="0"/>
           </a:p>
           <a:p>
-            <a:pPr indent="0" marL="0">
+            <a:pPr marL="0" indent="0">
               <a:buNone/>
             </a:pPr>
             <a:r>
@@ -8303,7 +8022,7 @@
             <a:endParaRPr lang="en-US" sz="1120" dirty="0"/>
           </a:p>
           <a:p>
-            <a:pPr indent="0" marL="0">
+            <a:pPr marL="0" indent="0">
               <a:buNone/>
             </a:pPr>
             <a:r>
@@ -8320,7 +8039,7 @@
             <a:endParaRPr lang="en-US" sz="1120" dirty="0"/>
           </a:p>
           <a:p>
-            <a:pPr indent="0" marL="0">
+            <a:pPr marL="0" indent="0">
               <a:buNone/>
             </a:pPr>
             <a:r>
@@ -8337,13 +8056,13 @@
             <a:endParaRPr lang="en-US" sz="1120" dirty="0"/>
           </a:p>
           <a:p>
-            <a:pPr indent="0" marL="0">
+            <a:pPr marL="0" indent="0">
               <a:buNone/>
             </a:pPr>
             <a:endParaRPr lang="en-US" sz="1120" dirty="0"/>
           </a:p>
           <a:p>
-            <a:pPr indent="0" marL="0">
+            <a:pPr marL="0" indent="0">
               <a:buNone/>
             </a:pPr>
             <a:r>
@@ -8360,7 +8079,7 @@
             <a:endParaRPr lang="en-US" sz="1120" dirty="0"/>
           </a:p>
           <a:p>
-            <a:pPr indent="0" marL="0">
+            <a:pPr marL="0" indent="0">
               <a:buNone/>
             </a:pPr>
             <a:r>
@@ -8377,13 +8096,13 @@
             <a:endParaRPr lang="en-US" sz="1120" dirty="0"/>
           </a:p>
           <a:p>
-            <a:pPr indent="0" marL="0">
+            <a:pPr marL="0" indent="0">
               <a:buNone/>
             </a:pPr>
             <a:endParaRPr lang="en-US" sz="1120" dirty="0"/>
           </a:p>
           <a:p>
-            <a:pPr indent="0" marL="0">
+            <a:pPr marL="0" indent="0">
               <a:buNone/>
             </a:pPr>
             <a:r>
@@ -8400,7 +8119,7 @@
             <a:endParaRPr lang="en-US" sz="1120" dirty="0"/>
           </a:p>
           <a:p>
-            <a:pPr indent="0" marL="0">
+            <a:pPr marL="0" indent="0">
               <a:buNone/>
             </a:pPr>
             <a:r>
@@ -8439,7 +8158,7 @@
           <a:bodyPr wrap="square" lIns="0" tIns="0" rIns="0" bIns="0" rtlCol="0" anchor="ctr"/>
           <a:lstStyle/>
           <a:p>
-            <a:pPr indent="0" marL="0">
+            <a:pPr marL="0" indent="0">
               <a:buNone/>
             </a:pPr>
             <a:r>
@@ -8477,7 +8196,7 @@
           </a:bodyPr>
           <a:lstStyle/>
           <a:p>
-            <a:pPr indent="0" marL="0">
+            <a:pPr marL="0" indent="0">
               <a:buNone/>
             </a:pPr>
             <a:r>
@@ -8538,7 +8257,7 @@
           </a:bodyPr>
           <a:lstStyle/>
           <a:p>
-            <a:pPr indent="0" marL="0">
+            <a:pPr marL="0" indent="0">
               <a:buNone/>
             </a:pPr>
             <a:r>
@@ -8599,7 +8318,7 @@
           </a:bodyPr>
           <a:lstStyle/>
           <a:p>
-            <a:pPr indent="0" marL="0">
+            <a:pPr marL="0" indent="0">
               <a:buNone/>
             </a:pPr>
             <a:r>
@@ -8660,7 +8379,7 @@
           </a:bodyPr>
           <a:lstStyle/>
           <a:p>
-            <a:pPr indent="0" marL="0">
+            <a:pPr marL="0" indent="0">
               <a:buNone/>
             </a:pPr>
             <a:r>
@@ -8721,7 +8440,7 @@
           </a:bodyPr>
           <a:lstStyle/>
           <a:p>
-            <a:pPr indent="0" marL="0">
+            <a:pPr marL="0" indent="0">
               <a:buNone/>
             </a:pPr>
             <a:r>
@@ -8788,7 +8507,7 @@
           </a:bodyPr>
           <a:lstStyle/>
           <a:p>
-            <a:pPr indent="0" marL="0">
+            <a:pPr marL="0" indent="0">
               <a:buNone/>
             </a:pPr>
             <a:r>
@@ -8824,7 +8543,7 @@
           <a:bodyPr wrap="square" lIns="0" tIns="0" rIns="0" bIns="0" rtlCol="0" anchor="ctr"/>
           <a:lstStyle/>
           <a:p>
-            <a:pPr indent="0" marL="0">
+            <a:pPr marL="0" indent="0">
               <a:buNone/>
             </a:pPr>
             <a:r>
@@ -8860,7 +8579,7 @@
           <a:bodyPr wrap="square" lIns="0" tIns="0" rIns="0" bIns="0" rtlCol="0" anchor="ctr"/>
           <a:lstStyle/>
           <a:p>
-            <a:pPr algn="r" indent="0" marL="0">
+            <a:pPr marL="0" indent="0" algn="r">
               <a:buNone/>
             </a:pPr>
             <a:r>
@@ -8891,6 +8610,7 @@
         <a:solidFill>
           <a:srgbClr val="FFFFFF"/>
         </a:solidFill>
+        <a:effectLst/>
       </p:bgPr>
     </p:bg>
     <p:spTree>
@@ -8928,7 +8648,7 @@
           <a:bodyPr wrap="square" lIns="0" tIns="0" rIns="0" bIns="0" rtlCol="0" anchor="ctr"/>
           <a:lstStyle/>
           <a:p>
-            <a:pPr indent="0" marL="0">
+            <a:pPr marL="0" indent="0">
               <a:buNone/>
             </a:pPr>
             <a:r>
@@ -8969,7 +8689,7 @@
           </a:bodyPr>
           <a:lstStyle/>
           <a:p>
-            <a:pPr indent="0" marL="0">
+            <a:pPr marL="0" indent="0">
               <a:buNone/>
             </a:pPr>
             <a:r>
@@ -9039,7 +8759,7 @@
           </a:bodyPr>
           <a:lstStyle/>
           <a:p>
-            <a:pPr indent="0" marL="0">
+            <a:pPr marL="0" indent="0">
               <a:buNone/>
             </a:pPr>
             <a:r>
@@ -9056,7 +8776,7 @@
             <a:endParaRPr lang="en-US" sz="1700" dirty="0"/>
           </a:p>
           <a:p>
-            <a:pPr indent="0" marL="0">
+            <a:pPr marL="0" indent="0">
               <a:buNone/>
             </a:pPr>
             <a:r>
@@ -9073,7 +8793,7 @@
             <a:endParaRPr lang="en-US" sz="1700" dirty="0"/>
           </a:p>
           <a:p>
-            <a:pPr indent="0" marL="0">
+            <a:pPr marL="0" indent="0">
               <a:buNone/>
             </a:pPr>
             <a:r>
@@ -9090,7 +8810,7 @@
             <a:endParaRPr lang="en-US" sz="1700" dirty="0"/>
           </a:p>
           <a:p>
-            <a:pPr indent="0" marL="0">
+            <a:pPr marL="0" indent="0">
               <a:buNone/>
             </a:pPr>
             <a:r>
@@ -9129,7 +8849,7 @@
           <a:bodyPr wrap="square" lIns="0" tIns="0" rIns="0" bIns="0" rtlCol="0" anchor="ctr"/>
           <a:lstStyle/>
           <a:p>
-            <a:pPr indent="0" marL="0">
+            <a:pPr marL="0" indent="0">
               <a:buNone/>
             </a:pPr>
             <a:r>
@@ -9167,7 +8887,7 @@
           </a:bodyPr>
           <a:lstStyle/>
           <a:p>
-            <a:pPr indent="0" marL="0">
+            <a:pPr marL="0" indent="0">
               <a:buNone/>
             </a:pPr>
             <a:r>
@@ -9228,7 +8948,7 @@
           </a:bodyPr>
           <a:lstStyle/>
           <a:p>
-            <a:pPr indent="0" marL="0">
+            <a:pPr marL="0" indent="0">
               <a:buNone/>
             </a:pPr>
             <a:r>
@@ -9289,7 +9009,7 @@
           </a:bodyPr>
           <a:lstStyle/>
           <a:p>
-            <a:pPr indent="0" marL="0">
+            <a:pPr marL="0" indent="0">
               <a:buNone/>
             </a:pPr>
             <a:r>
@@ -9356,7 +9076,7 @@
           </a:bodyPr>
           <a:lstStyle/>
           <a:p>
-            <a:pPr indent="0" marL="0">
+            <a:pPr marL="0" indent="0">
               <a:buNone/>
             </a:pPr>
             <a:r>
@@ -9370,13 +9090,13 @@
             <a:endParaRPr lang="en-US" sz="1500" dirty="0"/>
           </a:p>
           <a:p>
-            <a:pPr indent="0" marL="0">
+            <a:pPr marL="0" indent="0">
               <a:buNone/>
             </a:pPr>
             <a:endParaRPr lang="en-US" sz="1500" dirty="0"/>
           </a:p>
           <a:p>
-            <a:pPr indent="0" marL="0">
+            <a:pPr marL="0" indent="0">
               <a:buNone/>
             </a:pPr>
             <a:r>
@@ -9390,7 +9110,7 @@
             <a:endParaRPr lang="en-US" sz="1500" dirty="0"/>
           </a:p>
           <a:p>
-            <a:pPr indent="0" marL="0">
+            <a:pPr marL="0" indent="0">
               <a:buNone/>
             </a:pPr>
             <a:r>
@@ -9434,7 +9154,7 @@
           </a:bodyPr>
           <a:lstStyle/>
           <a:p>
-            <a:pPr indent="0" marL="0">
+            <a:pPr marL="0" indent="0">
               <a:buNone/>
             </a:pPr>
             <a:r>
@@ -9470,7 +9190,7 @@
           <a:bodyPr wrap="square" lIns="0" tIns="0" rIns="0" bIns="0" rtlCol="0" anchor="ctr"/>
           <a:lstStyle/>
           <a:p>
-            <a:pPr indent="0" marL="0">
+            <a:pPr marL="0" indent="0">
               <a:buNone/>
             </a:pPr>
             <a:r>
@@ -9506,7 +9226,7 @@
           <a:bodyPr wrap="square" lIns="0" tIns="0" rIns="0" bIns="0" rtlCol="0" anchor="ctr"/>
           <a:lstStyle/>
           <a:p>
-            <a:pPr algn="r" indent="0" marL="0">
+            <a:pPr marL="0" indent="0" algn="r">
               <a:buNone/>
             </a:pPr>
             <a:r>
@@ -9822,4 +9542,299 @@
     </a:ext>
   </a:extLst>
 </a:theme>
+</file>
+
+<file path=ppt/theme/theme2.xml><?xml version="1.0" encoding="utf-8"?>
+<a:theme xmlns:a="http://schemas.openxmlformats.org/drawingml/2006/main" name="Office Theme">
+  <a:themeElements>
+    <a:clrScheme name="Office">
+      <a:dk1>
+        <a:sysClr val="windowText" lastClr="000000"/>
+      </a:dk1>
+      <a:lt1>
+        <a:sysClr val="window" lastClr="FFFFFF"/>
+      </a:lt1>
+      <a:dk2>
+        <a:srgbClr val="44546A"/>
+      </a:dk2>
+      <a:lt2>
+        <a:srgbClr val="E7E6E6"/>
+      </a:lt2>
+      <a:accent1>
+        <a:srgbClr val="4472C4"/>
+      </a:accent1>
+      <a:accent2>
+        <a:srgbClr val="ED7D31"/>
+      </a:accent2>
+      <a:accent3>
+        <a:srgbClr val="A5A5A5"/>
+      </a:accent3>
+      <a:accent4>
+        <a:srgbClr val="FFC000"/>
+      </a:accent4>
+      <a:accent5>
+        <a:srgbClr val="5B9BD5"/>
+      </a:accent5>
+      <a:accent6>
+        <a:srgbClr val="70AD47"/>
+      </a:accent6>
+      <a:hlink>
+        <a:srgbClr val="0563C1"/>
+      </a:hlink>
+      <a:folHlink>
+        <a:srgbClr val="954F72"/>
+      </a:folHlink>
+    </a:clrScheme>
+    <a:fontScheme name="Office">
+      <a:majorFont>
+        <a:latin typeface="Calibri Light" panose="020F0302020204030204"/>
+        <a:ea typeface=""/>
+        <a:cs typeface=""/>
+        <a:font script="Jpan" typeface="游ゴシック Light"/>
+        <a:font script="Hang" typeface="맑은 고딕"/>
+        <a:font script="Hans" typeface="等线 Light"/>
+        <a:font script="Hant" typeface="新細明體"/>
+        <a:font script="Arab" typeface="Times New Roman"/>
+        <a:font script="Hebr" typeface="Times New Roman"/>
+        <a:font script="Thai" typeface="Angsana New"/>
+        <a:font script="Ethi" typeface="Nyala"/>
+        <a:font script="Beng" typeface="Vrinda"/>
+        <a:font script="Gujr" typeface="Shruti"/>
+        <a:font script="Khmr" typeface="MoolBoran"/>
+        <a:font script="Knda" typeface="Tunga"/>
+        <a:font script="Guru" typeface="Raavi"/>
+        <a:font script="Cans" typeface="Euphemia"/>
+        <a:font script="Cher" typeface="Plantagenet Cherokee"/>
+        <a:font script="Yiii" typeface="Microsoft Yi Baiti"/>
+        <a:font script="Tibt" typeface="Microsoft Himalaya"/>
+        <a:font script="Thaa" typeface="MV Boli"/>
+        <a:font script="Deva" typeface="Mangal"/>
+        <a:font script="Telu" typeface="Gautami"/>
+        <a:font script="Taml" typeface="Latha"/>
+        <a:font script="Syrc" typeface="Estrangelo Edessa"/>
+        <a:font script="Orya" typeface="Kalinga"/>
+        <a:font script="Mlym" typeface="Kartika"/>
+        <a:font script="Laoo" typeface="DokChampa"/>
+        <a:font script="Sinh" typeface="Iskoola Pota"/>
+        <a:font script="Mong" typeface="Mongolian Baiti"/>
+        <a:font script="Viet" typeface="Times New Roman"/>
+        <a:font script="Uigh" typeface="Microsoft Uighur"/>
+        <a:font script="Geor" typeface="Sylfaen"/>
+        <a:font script="Armn" typeface="Arial"/>
+        <a:font script="Bugi" typeface="Leelawadee UI"/>
+        <a:font script="Bopo" typeface="Microsoft JhengHei"/>
+        <a:font script="Java" typeface="Javanese Text"/>
+        <a:font script="Lisu" typeface="Segoe UI"/>
+        <a:font script="Mymr" typeface="Myanmar Text"/>
+        <a:font script="Nkoo" typeface="Ebrima"/>
+        <a:font script="Olck" typeface="Nirmala UI"/>
+        <a:font script="Osma" typeface="Ebrima"/>
+        <a:font script="Phag" typeface="Phagspa"/>
+        <a:font script="Syrn" typeface="Estrangelo Edessa"/>
+        <a:font script="Syrj" typeface="Estrangelo Edessa"/>
+        <a:font script="Syre" typeface="Estrangelo Edessa"/>
+        <a:font script="Sora" typeface="Nirmala UI"/>
+        <a:font script="Tale" typeface="Microsoft Tai Le"/>
+        <a:font script="Talu" typeface="Microsoft New Tai Lue"/>
+        <a:font script="Tfng" typeface="Ebrima"/>
+      </a:majorFont>
+      <a:minorFont>
+        <a:latin typeface="Calibri" panose="020F0502020204030204"/>
+        <a:ea typeface=""/>
+        <a:cs typeface=""/>
+        <a:font script="Jpan" typeface="游ゴシック"/>
+        <a:font script="Hang" typeface="맑은 고딕"/>
+        <a:font script="Hans" typeface="等线"/>
+        <a:font script="Hant" typeface="新細明體"/>
+        <a:font script="Arab" typeface="Arial"/>
+        <a:font script="Hebr" typeface="Arial"/>
+        <a:font script="Thai" typeface="Cordia New"/>
+        <a:font script="Ethi" typeface="Nyala"/>
+        <a:font script="Beng" typeface="Vrinda"/>
+        <a:font script="Gujr" typeface="Shruti"/>
+        <a:font script="Khmr" typeface="DaunPenh"/>
+        <a:font script="Knda" typeface="Tunga"/>
+        <a:font script="Guru" typeface="Raavi"/>
+        <a:font script="Cans" typeface="Euphemia"/>
+        <a:font script="Cher" typeface="Plantagenet Cherokee"/>
+        <a:font script="Yiii" typeface="Microsoft Yi Baiti"/>
+        <a:font script="Tibt" typeface="Microsoft Himalaya"/>
+        <a:font script="Thaa" typeface="MV Boli"/>
+        <a:font script="Deva" typeface="Mangal"/>
+        <a:font script="Telu" typeface="Gautami"/>
+        <a:font script="Taml" typeface="Latha"/>
+        <a:font script="Syrc" typeface="Estrangelo Edessa"/>
+        <a:font script="Orya" typeface="Kalinga"/>
+        <a:font script="Mlym" typeface="Kartika"/>
+        <a:font script="Laoo" typeface="DokChampa"/>
+        <a:font script="Sinh" typeface="Iskoola Pota"/>
+        <a:font script="Mong" typeface="Mongolian Baiti"/>
+        <a:font script="Viet" typeface="Arial"/>
+        <a:font script="Uigh" typeface="Microsoft Uighur"/>
+        <a:font script="Geor" typeface="Sylfaen"/>
+        <a:font script="Armn" typeface="Arial"/>
+        <a:font script="Bugi" typeface="Leelawadee UI"/>
+        <a:font script="Bopo" typeface="Microsoft JhengHei"/>
+        <a:font script="Java" typeface="Javanese Text"/>
+        <a:font script="Lisu" typeface="Segoe UI"/>
+        <a:font script="Mymr" typeface="Myanmar Text"/>
+        <a:font script="Nkoo" typeface="Ebrima"/>
+        <a:font script="Olck" typeface="Nirmala UI"/>
+        <a:font script="Osma" typeface="Ebrima"/>
+        <a:font script="Phag" typeface="Phagspa"/>
+        <a:font script="Syrn" typeface="Estrangelo Edessa"/>
+        <a:font script="Syrj" typeface="Estrangelo Edessa"/>
+        <a:font script="Syre" typeface="Estrangelo Edessa"/>
+        <a:font script="Sora" typeface="Nirmala UI"/>
+        <a:font script="Tale" typeface="Microsoft Tai Le"/>
+        <a:font script="Talu" typeface="Microsoft New Tai Lue"/>
+        <a:font script="Tfng" typeface="Ebrima"/>
+      </a:minorFont>
+    </a:fontScheme>
+    <a:fmtScheme name="Office">
+      <a:fillStyleLst>
+        <a:solidFill>
+          <a:schemeClr val="phClr"/>
+        </a:solidFill>
+        <a:gradFill rotWithShape="1">
+          <a:gsLst>
+            <a:gs pos="0">
+              <a:schemeClr val="phClr">
+                <a:lumMod val="110000"/>
+                <a:satMod val="105000"/>
+                <a:tint val="67000"/>
+              </a:schemeClr>
+            </a:gs>
+            <a:gs pos="50000">
+              <a:schemeClr val="phClr">
+                <a:lumMod val="105000"/>
+                <a:satMod val="103000"/>
+                <a:tint val="73000"/>
+              </a:schemeClr>
+            </a:gs>
+            <a:gs pos="100000">
+              <a:schemeClr val="phClr">
+                <a:lumMod val="105000"/>
+                <a:satMod val="109000"/>
+                <a:tint val="81000"/>
+              </a:schemeClr>
+            </a:gs>
+          </a:gsLst>
+          <a:lin ang="5400000" scaled="0"/>
+        </a:gradFill>
+        <a:gradFill rotWithShape="1">
+          <a:gsLst>
+            <a:gs pos="0">
+              <a:schemeClr val="phClr">
+                <a:satMod val="103000"/>
+                <a:lumMod val="102000"/>
+                <a:tint val="94000"/>
+              </a:schemeClr>
+            </a:gs>
+            <a:gs pos="50000">
+              <a:schemeClr val="phClr">
+                <a:satMod val="110000"/>
+                <a:lumMod val="100000"/>
+                <a:shade val="100000"/>
+              </a:schemeClr>
+            </a:gs>
+            <a:gs pos="100000">
+              <a:schemeClr val="phClr">
+                <a:lumMod val="99000"/>
+                <a:satMod val="120000"/>
+                <a:shade val="78000"/>
+              </a:schemeClr>
+            </a:gs>
+          </a:gsLst>
+          <a:lin ang="5400000" scaled="0"/>
+        </a:gradFill>
+      </a:fillStyleLst>
+      <a:lnStyleLst>
+        <a:ln w="6350" cap="flat" cmpd="sng" algn="ctr">
+          <a:solidFill>
+            <a:schemeClr val="phClr"/>
+          </a:solidFill>
+          <a:prstDash val="solid"/>
+          <a:miter lim="800000"/>
+        </a:ln>
+        <a:ln w="12700" cap="flat" cmpd="sng" algn="ctr">
+          <a:solidFill>
+            <a:schemeClr val="phClr"/>
+          </a:solidFill>
+          <a:prstDash val="solid"/>
+          <a:miter lim="800000"/>
+        </a:ln>
+        <a:ln w="19050" cap="flat" cmpd="sng" algn="ctr">
+          <a:solidFill>
+            <a:schemeClr val="phClr"/>
+          </a:solidFill>
+          <a:prstDash val="solid"/>
+          <a:miter lim="800000"/>
+        </a:ln>
+      </a:lnStyleLst>
+      <a:effectStyleLst>
+        <a:effectStyle>
+          <a:effectLst/>
+        </a:effectStyle>
+        <a:effectStyle>
+          <a:effectLst/>
+        </a:effectStyle>
+        <a:effectStyle>
+          <a:effectLst>
+            <a:outerShdw blurRad="57150" dist="19050" dir="5400000" algn="ctr" rotWithShape="0">
+              <a:srgbClr val="000000">
+                <a:alpha val="63000"/>
+              </a:srgbClr>
+            </a:outerShdw>
+          </a:effectLst>
+        </a:effectStyle>
+      </a:effectStyleLst>
+      <a:bgFillStyleLst>
+        <a:solidFill>
+          <a:schemeClr val="phClr"/>
+        </a:solidFill>
+        <a:solidFill>
+          <a:schemeClr val="phClr">
+            <a:tint val="95000"/>
+            <a:satMod val="170000"/>
+          </a:schemeClr>
+        </a:solidFill>
+        <a:gradFill rotWithShape="1">
+          <a:gsLst>
+            <a:gs pos="0">
+              <a:schemeClr val="phClr">
+                <a:tint val="93000"/>
+                <a:satMod val="150000"/>
+                <a:shade val="98000"/>
+                <a:lumMod val="102000"/>
+              </a:schemeClr>
+            </a:gs>
+            <a:gs pos="50000">
+              <a:schemeClr val="phClr">
+                <a:tint val="98000"/>
+                <a:satMod val="130000"/>
+                <a:shade val="90000"/>
+                <a:lumMod val="103000"/>
+              </a:schemeClr>
+            </a:gs>
+            <a:gs pos="100000">
+              <a:schemeClr val="phClr">
+                <a:shade val="63000"/>
+                <a:satMod val="120000"/>
+              </a:schemeClr>
+            </a:gs>
+          </a:gsLst>
+          <a:lin ang="5400000" scaled="0"/>
+        </a:gradFill>
+      </a:bgFillStyleLst>
+    </a:fmtScheme>
+  </a:themeElements>
+  <a:objectDefaults/>
+  <a:extraClrSchemeLst/>
+  <a:extLst>
+    <a:ext uri="{05A4C25C-085E-4340-85A3-A5531E510DB2}">
+      <thm15:themeFamily xmlns:thm15="http://schemas.microsoft.com/office/thememl/2012/main" name="Office Theme" id="{62F939B6-93AF-4DB8-9C6B-D6C7DFDC589F}" vid="{4A3C46E8-61CC-4603-A589-7422A47A8E4A}"/>
+    </a:ext>
+  </a:extLst>
+</a:theme>
 </file>